--- a/Seasonal_Agriculture_Performance_Analysis_VOIS_Project(ppt).pptx
+++ b/Seasonal_Agriculture_Performance_Analysis_VOIS_Project(ppt).pptx
@@ -12890,7 +12890,7 @@
         <p:spPr>
           <a:xfrm>
             <a:off x="729256" y="1440320"/>
-            <a:ext cx="7232875" cy="584775"/>
+            <a:ext cx="6195979" cy="584775"/>
           </a:xfrm>
           <a:prstGeom prst="rect">
             <a:avLst/>
@@ -12910,7 +12910,7 @@
                   <a:srgbClr val="225799"/>
                 </a:solidFill>
               </a:rPr>
-              <a:t>https://github.com/Sharath4515/Seasonal-Agriculture-Performance-Analysis/upload/main</a:t>
+              <a:t>https://github.com/Sharath4515/Seasonal-Agriculture-Performance-Analysis</a:t>
             </a:r>
             <a:endParaRPr sz="1600" dirty="0">
               <a:solidFill>
